--- a/Aula14_Complexidade_de_Algoritmos/Aula14_Teoria.pptx
+++ b/Aula14_Complexidade_de_Algoritmos/Aula14_Teoria.pptx
@@ -41,6 +41,7 @@
     <p:sldId id="289" r:id="rId35"/>
     <p:sldId id="290" r:id="rId36"/>
     <p:sldId id="291" r:id="rId37"/>
+    <p:sldId id="292" r:id="rId43"/>
   </p:sldIdLst>
   <p:notesMasterIdLst>
     <p:notesMasterId r:id="rId38"/>
@@ -7814,8 +7815,9 @@
     <p:bg>
       <p:bgPr>
         <a:solidFill>
-          <a:srgbClr val="F7F8FA"/>
+          <a:srgbClr val="12233B"/>
         </a:solidFill>
+        <a:effectLst/>
       </p:bgPr>
     </p:bg>
     <p:spTree>
@@ -7834,226 +7836,336 @@
       </p:grpSpPr>
       <p:sp>
         <p:nvSpPr>
-          <p:cNvPr id="2" name="Shape 0"/>
-          <p:cNvSpPr/>
-          <p:nvPr/>
-        </p:nvSpPr>
-        <p:spPr>
-          <a:xfrm>
-            <a:off x="0" y="0"/>
-            <a:ext cx="12191695" cy="6858000"/>
-          </a:xfrm>
-          <a:prstGeom prst="rect">
+          <p:cNvPr id="2" name="Oval 1"/>
+          <p:cNvSpPr/>
+          <p:nvPr/>
+        </p:nvSpPr>
+        <p:spPr>
+          <a:xfrm>
+            <a:off x="8899855" y="-1645920"/>
+            <a:ext cx="4206240" cy="4206240"/>
+          </a:xfrm>
+          <a:prstGeom prst="ellipse">
             <a:avLst/>
           </a:prstGeom>
           <a:solidFill>
-            <a:srgbClr val="F7F8FA"/>
+            <a:srgbClr val="2C7A8C">
+              <a:alpha val="12000"/>
+            </a:srgbClr>
           </a:solidFill>
-          <a:ln w="12700">
-            <a:solidFill>
-              <a:srgbClr val="F7F8FA"/>
-            </a:solidFill>
-            <a:prstDash val="solid"/>
+          <a:ln>
+            <a:noFill/>
           </a:ln>
-        </p:spPr>
-      </p:sp>
-      <p:sp>
-        <p:nvSpPr>
-          <p:cNvPr id="3" name="Text 1"/>
-          <p:cNvSpPr/>
-          <p:nvPr/>
-        </p:nvSpPr>
-        <p:spPr>
-          <a:xfrm>
-            <a:off x="685800" y="1234440"/>
-            <a:ext cx="6583680" cy="548640"/>
-          </a:xfrm>
-          <a:prstGeom prst="rect">
-            <a:avLst/>
-          </a:prstGeom>
-          <a:noFill/>
-          <a:ln/>
-        </p:spPr>
-        <p:txBody>
-          <a:bodyPr wrap="square" lIns="0" tIns="0" rIns="0" bIns="0" rtlCol="0" anchor="ctr"/>
-          <a:lstStyle/>
-          <a:p>
-            <a:pPr indent="0" marL="0">
-              <a:buNone/>
-            </a:pPr>
-            <a:r>
-              <a:rPr lang="en-US" sz="3800" b="1" dirty="0">
-                <a:solidFill>
-                  <a:srgbClr val="111827"/>
-                </a:solidFill>
-                <a:latin typeface="Aptos Display" pitchFamily="34" charset="0"/>
-                <a:ea typeface="Aptos Display" pitchFamily="34" charset="-122"/>
-                <a:cs typeface="Aptos Display" pitchFamily="34" charset="-120"/>
+          <a:effectLst/>
+        </p:spPr>
+        <p:style>
+          <a:lnRef idx="1">
+            <a:schemeClr val="accent1"/>
+          </a:lnRef>
+          <a:fillRef idx="3">
+            <a:schemeClr val="accent1"/>
+          </a:fillRef>
+          <a:effectRef idx="2">
+            <a:schemeClr val="accent1"/>
+          </a:effectRef>
+          <a:fontRef idx="minor">
+            <a:schemeClr val="lt1"/>
+          </a:fontRef>
+        </p:style>
+        <p:txBody>
+          <a:bodyPr rtlCol="0" anchor="ctr"/>
+          <a:lstStyle/>
+          <a:p>
+            <a:pPr algn="ctr"/>
+          </a:p>
+        </p:txBody>
+      </p:sp>
+      <p:sp>
+        <p:nvSpPr>
+          <p:cNvPr id="3" name="Oval 2"/>
+          <p:cNvSpPr/>
+          <p:nvPr/>
+        </p:nvSpPr>
+        <p:spPr>
+          <a:xfrm>
+            <a:off x="10454335" y="548640"/>
+            <a:ext cx="2194560" cy="2194560"/>
+          </a:xfrm>
+          <a:prstGeom prst="ellipse">
+            <a:avLst/>
+          </a:prstGeom>
+          <a:solidFill>
+            <a:srgbClr val="E8963C">
+              <a:alpha val="15000"/>
+            </a:srgbClr>
+          </a:solidFill>
+          <a:ln>
+            <a:noFill/>
+          </a:ln>
+          <a:effectLst/>
+        </p:spPr>
+        <p:style>
+          <a:lnRef idx="1">
+            <a:schemeClr val="accent1"/>
+          </a:lnRef>
+          <a:fillRef idx="3">
+            <a:schemeClr val="accent1"/>
+          </a:fillRef>
+          <a:effectRef idx="2">
+            <a:schemeClr val="accent1"/>
+          </a:effectRef>
+          <a:fontRef idx="minor">
+            <a:schemeClr val="lt1"/>
+          </a:fontRef>
+        </p:style>
+        <p:txBody>
+          <a:bodyPr rtlCol="0" anchor="ctr"/>
+          <a:lstStyle/>
+          <a:p>
+            <a:pPr algn="ctr"/>
+          </a:p>
+        </p:txBody>
+      </p:sp>
+      <p:sp>
+        <p:nvSpPr>
+          <p:cNvPr id="4" name="Oval 3"/>
+          <p:cNvSpPr/>
+          <p:nvPr/>
+        </p:nvSpPr>
+        <p:spPr>
+          <a:xfrm>
+            <a:off x="822960" y="914400"/>
+            <a:ext cx="868680" cy="868680"/>
+          </a:xfrm>
+          <a:prstGeom prst="ellipse">
+            <a:avLst/>
+          </a:prstGeom>
+          <a:solidFill>
+            <a:srgbClr val="2C7A8C"/>
+          </a:solidFill>
+          <a:ln>
+            <a:noFill/>
+          </a:ln>
+          <a:effectLst/>
+        </p:spPr>
+        <p:style>
+          <a:lnRef idx="1">
+            <a:schemeClr val="accent1"/>
+          </a:lnRef>
+          <a:fillRef idx="3">
+            <a:schemeClr val="accent1"/>
+          </a:fillRef>
+          <a:effectRef idx="2">
+            <a:schemeClr val="accent1"/>
+          </a:effectRef>
+          <a:fontRef idx="minor">
+            <a:schemeClr val="lt1"/>
+          </a:fontRef>
+        </p:style>
+        <p:txBody>
+          <a:bodyPr rtlCol="0" anchor="ctr"/>
+          <a:lstStyle/>
+          <a:p>
+            <a:pPr algn="ctr"/>
+          </a:p>
+        </p:txBody>
+      </p:sp>
+      <p:pic>
+        <p:nvPicPr>
+          <p:cNvPr id="5" name="Picture 4" descr="Aula08.png"/>
+          <p:cNvPicPr>
+            <a:picLocks noChangeAspect="1"/>
+          </p:cNvPicPr>
+          <p:nvPr/>
+        </p:nvPicPr>
+        <p:blipFill>
+          <a:blip r:embed="rId4"/>
+          <a:stretch>
+            <a:fillRect/>
+          </a:stretch>
+        </p:blipFill>
+        <p:spPr>
+          <a:xfrm>
+            <a:off x="1028700" y="1120140"/>
+            <a:ext cx="457200" cy="457200"/>
+          </a:xfrm>
+          <a:prstGeom prst="rect">
+            <a:avLst/>
+          </a:prstGeom>
+        </p:spPr>
+      </p:pic>
+      <p:sp>
+        <p:nvSpPr>
+          <p:cNvPr id="6" name="TextBox 5"/>
+          <p:cNvSpPr txBox="1"/>
+          <p:nvPr/>
+        </p:nvSpPr>
+        <p:spPr>
+          <a:xfrm>
+            <a:off x="457200" y="2148840"/>
+            <a:ext cx="9144000" cy="274320"/>
+          </a:xfrm>
+          <a:prstGeom prst="rect">
+            <a:avLst/>
+          </a:prstGeom>
+          <a:noFill/>
+        </p:spPr>
+        <p:txBody>
+          <a:bodyPr wrap="square">
+            <a:spAutoFit/>
+          </a:bodyPr>
+          <a:lstStyle/>
+          <a:p>
+            <a:pPr algn="l"/>
+            <a:r>
+              <a:rPr sz="1100" b="1" i="0">
+                <a:solidFill>
+                  <a:srgbClr val="E8963C"/>
+                </a:solidFill>
+                <a:latin typeface="Calibri"/>
+              </a:rPr>
+              <a:t>PENSAMENTO COMPUTACIONAL · AULA 14 DE 15</a:t>
+            </a:r>
+          </a:p>
+        </p:txBody>
+      </p:sp>
+      <p:sp>
+        <p:nvSpPr>
+          <p:cNvPr id="7" name="TextBox 6"/>
+          <p:cNvSpPr txBox="1"/>
+          <p:nvPr/>
+        </p:nvSpPr>
+        <p:spPr>
+          <a:xfrm>
+            <a:off x="457200" y="2514600"/>
+            <a:ext cx="10789920" cy="1463040"/>
+          </a:xfrm>
+          <a:prstGeom prst="rect">
+            <a:avLst/>
+          </a:prstGeom>
+          <a:noFill/>
+        </p:spPr>
+        <p:txBody>
+          <a:bodyPr wrap="square">
+            <a:spAutoFit/>
+          </a:bodyPr>
+          <a:lstStyle/>
+          <a:p>
+            <a:pPr algn="l"/>
+            <a:r>
+              <a:rPr sz="4000" b="1" i="0">
+                <a:solidFill>
+                  <a:srgbClr val="FFFFFF"/>
+                </a:solidFill>
+                <a:latin typeface="Cambria"/>
               </a:rPr>
               <a:t>Complexidade de Algoritmos</a:t>
             </a:r>
-            <a:endParaRPr lang="en-US" sz="3800" dirty="0"/>
-          </a:p>
-        </p:txBody>
-      </p:sp>
-      <p:sp>
-        <p:nvSpPr>
-          <p:cNvPr id="4" name="Text 2"/>
-          <p:cNvSpPr/>
-          <p:nvPr/>
-        </p:nvSpPr>
-        <p:spPr>
-          <a:xfrm>
-            <a:off x="713232" y="1901952"/>
-            <a:ext cx="6217920" cy="822960"/>
-          </a:xfrm>
-          <a:prstGeom prst="rect">
-            <a:avLst/>
-          </a:prstGeom>
-          <a:noFill/>
-          <a:ln/>
-        </p:spPr>
-        <p:txBody>
-          <a:bodyPr wrap="square" lIns="0" tIns="0" rIns="0" bIns="0" rtlCol="0" anchor="ctr"/>
-          <a:lstStyle/>
-          <a:p>
-            <a:pPr indent="0" marL="0">
-              <a:buNone/>
-            </a:pPr>
-            <a:r>
-              <a:rPr lang="en-US" sz="2200" dirty="0">
-                <a:solidFill>
-                  <a:srgbClr val="4B5563"/>
-                </a:solidFill>
-              </a:rPr>
-              <a:t>Da função de custo ao Big O</a:t>
-            </a:r>
-            <a:endParaRPr lang="en-US" sz="2200" dirty="0"/>
-          </a:p>
-          <a:p>
-            <a:pPr indent="0" marL="0">
-              <a:buNone/>
-            </a:pPr>
-            <a:r>
-              <a:rPr lang="en-US" sz="2200" dirty="0">
-                <a:solidFill>
-                  <a:srgbClr val="4B5563"/>
-                </a:solidFill>
-              </a:rPr>
-              <a:t>com experimentos em Julia + Pluto</a:t>
-            </a:r>
-            <a:endParaRPr lang="en-US" sz="2200" dirty="0"/>
-          </a:p>
-        </p:txBody>
-      </p:sp>
-      <p:sp>
-        <p:nvSpPr>
-          <p:cNvPr id="5" name="Shape 3"/>
-          <p:cNvSpPr/>
-          <p:nvPr/>
-        </p:nvSpPr>
-        <p:spPr>
-          <a:xfrm>
-            <a:off x="713232" y="2971800"/>
-            <a:ext cx="3657600" cy="0"/>
-          </a:xfrm>
-          <a:prstGeom prst="line">
-            <a:avLst/>
-          </a:prstGeom>
-          <a:noFill/>
-          <a:ln w="50800">
-            <a:solidFill>
-              <a:srgbClr val="2563EB"/>
-            </a:solidFill>
-            <a:prstDash val="solid"/>
-          </a:ln>
-        </p:spPr>
-      </p:sp>
-      <p:sp>
-        <p:nvSpPr>
-          <p:cNvPr id="6" name="Text 4"/>
-          <p:cNvSpPr/>
-          <p:nvPr/>
-        </p:nvSpPr>
-        <p:spPr>
-          <a:xfrm>
-            <a:off x="713232" y="3246120"/>
-            <a:ext cx="5120640" cy="320040"/>
-          </a:xfrm>
-          <a:prstGeom prst="rect">
-            <a:avLst/>
-          </a:prstGeom>
-          <a:noFill/>
-          <a:ln/>
-        </p:spPr>
-        <p:txBody>
-          <a:bodyPr wrap="square" lIns="0" tIns="0" rIns="0" bIns="0" rtlCol="0" anchor="ctr"/>
-          <a:lstStyle/>
-          <a:p>
-            <a:pPr indent="0" marL="0">
-              <a:buNone/>
-            </a:pPr>
-            <a:r>
-              <a:rPr lang="en-US" sz="1600" dirty="0">
-                <a:solidFill>
-                  <a:srgbClr val="111827"/>
-                </a:solidFill>
-              </a:rPr>
-              <a:t>Roteiro visual para aula ou minicurso</a:t>
-            </a:r>
-            <a:endParaRPr lang="en-US" sz="1600" dirty="0"/>
-          </a:p>
-        </p:txBody>
-      </p:sp>
-      <p:graphicFrame>
-        <p:nvGraphicFramePr>
-          <p:cNvPr id="7" name="Chart 0" descr=""/>
-          <p:cNvGraphicFramePr/>
-          <p:nvPr/>
-        </p:nvGraphicFramePr>
-        <p:xfrm>
-          <a:off x="6629400" y="1170432"/>
-          <a:ext cx="4754880" cy="4206240"/>
-        </p:xfrm>
-        <a:graphic xmlns:a="http://schemas.openxmlformats.org/drawingml/2006/main">
-          <a:graphicData uri="http://schemas.openxmlformats.org/drawingml/2006/chart">
-            <c:chart xmlns:c="http://schemas.openxmlformats.org/drawingml/2006/chart" r:id="rId1"/>
-          </a:graphicData>
-        </a:graphic>
-      </p:graphicFrame>
-      <p:sp>
-        <p:nvSpPr>
-          <p:cNvPr id="8" name="Text 5"/>
-          <p:cNvSpPr/>
-          <p:nvPr/>
-        </p:nvSpPr>
-        <p:spPr>
-          <a:xfrm>
-            <a:off x="11292840" y="6446520"/>
-            <a:ext cx="411480" cy="201168"/>
-          </a:xfrm>
-          <a:prstGeom prst="rect">
-            <a:avLst/>
-          </a:prstGeom>
-          <a:noFill/>
-          <a:ln/>
-        </p:spPr>
-        <p:txBody>
-          <a:bodyPr wrap="square" lIns="0" tIns="0" rIns="0" bIns="0" rtlCol="0" anchor="ctr"/>
-          <a:lstStyle/>
-          <a:p>
-            <a:pPr algn="r" indent="0" marL="0">
-              <a:buNone/>
-            </a:pPr>
-            <a:r>
-              <a:rPr lang="en-US" sz="900" dirty="0">
-                <a:solidFill>
-                  <a:srgbClr val="4B5563"/>
-                </a:solidFill>
-              </a:rPr>
-              <a:t>01</a:t>
-            </a:r>
-            <a:endParaRPr lang="en-US" sz="900" dirty="0"/>
+          </a:p>
+        </p:txBody>
+      </p:sp>
+      <p:sp>
+        <p:nvSpPr>
+          <p:cNvPr id="8" name="TextBox 7"/>
+          <p:cNvSpPr txBox="1"/>
+          <p:nvPr/>
+        </p:nvSpPr>
+        <p:spPr>
+          <a:xfrm>
+            <a:off x="457200" y="3977640"/>
+            <a:ext cx="9509760" cy="1005840"/>
+          </a:xfrm>
+          <a:prstGeom prst="rect">
+            <a:avLst/>
+          </a:prstGeom>
+          <a:noFill/>
+        </p:spPr>
+        <p:txBody>
+          <a:bodyPr wrap="square">
+            <a:spAutoFit/>
+          </a:bodyPr>
+          <a:lstStyle/>
+          <a:p>
+            <a:pPr algn="l"/>
+            <a:r>
+              <a:rPr sz="1700" b="0" i="1">
+                <a:solidFill>
+                  <a:srgbClr val="C9D3DE"/>
+                </a:solidFill>
+                <a:latin typeface="Calibri"/>
+              </a:rPr>
+              <a:t>Da função de custo ao Big O, com experimentos em Julia + Pluto — roteiro visual para aula ou minicurso.</a:t>
+            </a:r>
+          </a:p>
+        </p:txBody>
+      </p:sp>
+      <p:sp>
+        <p:nvSpPr>
+          <p:cNvPr id="9" name="TextBox 8"/>
+          <p:cNvSpPr txBox="1"/>
+          <p:nvPr/>
+        </p:nvSpPr>
+        <p:spPr>
+          <a:xfrm>
+            <a:off x="457200" y="6528816"/>
+            <a:ext cx="7315200" cy="256032"/>
+          </a:xfrm>
+          <a:prstGeom prst="rect">
+            <a:avLst/>
+          </a:prstGeom>
+          <a:noFill/>
+        </p:spPr>
+        <p:txBody>
+          <a:bodyPr wrap="square">
+            <a:spAutoFit/>
+          </a:bodyPr>
+          <a:lstStyle/>
+          <a:p>
+            <a:pPr algn="l"/>
+            <a:r>
+              <a:rPr sz="900" b="0" i="0">
+                <a:solidFill>
+                  <a:srgbClr val="8CA0B3"/>
+                </a:solidFill>
+                <a:latin typeface="Calibri"/>
+              </a:rPr>
+              <a:t>Aula 14 · Complexidade de Algoritmos</a:t>
+            </a:r>
+          </a:p>
+        </p:txBody>
+      </p:sp>
+      <p:sp>
+        <p:nvSpPr>
+          <p:cNvPr id="10" name="TextBox 9"/>
+          <p:cNvSpPr txBox="1"/>
+          <p:nvPr/>
+        </p:nvSpPr>
+        <p:spPr>
+          <a:xfrm>
+            <a:off x="10362895" y="6528816"/>
+            <a:ext cx="1371600" cy="256032"/>
+          </a:xfrm>
+          <a:prstGeom prst="rect">
+            <a:avLst/>
+          </a:prstGeom>
+          <a:noFill/>
+        </p:spPr>
+        <p:txBody>
+          <a:bodyPr wrap="square">
+            <a:spAutoFit/>
+          </a:bodyPr>
+          <a:lstStyle/>
+          <a:p>
+            <a:pPr algn="r"/>
+            <a:r>
+              <a:rPr sz="900" b="0" i="0">
+                <a:solidFill>
+                  <a:srgbClr val="8CA0B3"/>
+                </a:solidFill>
+                <a:latin typeface="Calibri"/>
+              </a:rPr>
+              <a:t>01 / 37</a:t>
+            </a:r>
           </a:p>
         </p:txBody>
       </p:sp>
@@ -20817,8 +20929,9 @@
     <p:bg>
       <p:bgPr>
         <a:solidFill>
-          <a:srgbClr val="F7F8FA"/>
+          <a:srgbClr val="12233B"/>
         </a:solidFill>
+        <a:effectLst/>
       </p:bgPr>
     </p:bg>
     <p:spTree>
@@ -20837,283 +20950,1046 @@
       </p:grpSpPr>
       <p:sp>
         <p:nvSpPr>
-          <p:cNvPr id="2" name="Shape 0"/>
-          <p:cNvSpPr/>
-          <p:nvPr/>
-        </p:nvSpPr>
-        <p:spPr>
-          <a:xfrm>
-            <a:off x="0" y="0"/>
-            <a:ext cx="12191695" cy="6858000"/>
-          </a:xfrm>
-          <a:prstGeom prst="rect">
+          <p:cNvPr id="2" name="Oval 1"/>
+          <p:cNvSpPr/>
+          <p:nvPr/>
+        </p:nvSpPr>
+        <p:spPr>
+          <a:xfrm>
+            <a:off x="8899855" y="-1645920"/>
+            <a:ext cx="4206240" cy="4206240"/>
+          </a:xfrm>
+          <a:prstGeom prst="ellipse">
             <a:avLst/>
           </a:prstGeom>
           <a:solidFill>
-            <a:srgbClr val="F7F8FA"/>
+            <a:srgbClr val="2C7A8C">
+              <a:alpha val="12000"/>
+            </a:srgbClr>
           </a:solidFill>
-          <a:ln w="12700">
-            <a:solidFill>
-              <a:srgbClr val="F7F8FA"/>
-            </a:solidFill>
-            <a:prstDash val="solid"/>
+          <a:ln>
+            <a:noFill/>
           </a:ln>
-        </p:spPr>
-      </p:sp>
-      <p:sp>
-        <p:nvSpPr>
-          <p:cNvPr id="3" name="Text 1"/>
-          <p:cNvSpPr/>
-          <p:nvPr/>
-        </p:nvSpPr>
-        <p:spPr>
-          <a:xfrm>
-            <a:off x="594360" y="320040"/>
-            <a:ext cx="8138160" cy="475488"/>
-          </a:xfrm>
-          <a:prstGeom prst="rect">
-            <a:avLst/>
-          </a:prstGeom>
-          <a:noFill/>
-          <a:ln/>
-        </p:spPr>
-        <p:txBody>
-          <a:bodyPr wrap="square" lIns="0" tIns="0" rIns="0" bIns="0" rtlCol="0" anchor="ctr"/>
-          <a:lstStyle/>
-          <a:p>
-            <a:pPr indent="0" marL="0">
-              <a:buNone/>
-            </a:pPr>
-            <a:r>
-              <a:rPr lang="en-US" sz="3000" b="1" dirty="0">
-                <a:solidFill>
-                  <a:srgbClr val="111827"/>
-                </a:solidFill>
-                <a:latin typeface="Aptos Display" pitchFamily="34" charset="0"/>
-                <a:ea typeface="Aptos Display" pitchFamily="34" charset="-122"/>
-                <a:cs typeface="Aptos Display" pitchFamily="34" charset="-120"/>
-              </a:rPr>
-              <a:t>Síntese</a:t>
-            </a:r>
-            <a:endParaRPr lang="en-US" sz="3000" dirty="0"/>
-          </a:p>
-        </p:txBody>
-      </p:sp>
-      <p:sp>
-        <p:nvSpPr>
-          <p:cNvPr id="4" name="Shape 2"/>
-          <p:cNvSpPr/>
-          <p:nvPr/>
-        </p:nvSpPr>
-        <p:spPr>
-          <a:xfrm>
-            <a:off x="594360" y="859536"/>
-            <a:ext cx="2011680" cy="0"/>
-          </a:xfrm>
-          <a:prstGeom prst="line">
-            <a:avLst/>
-          </a:prstGeom>
-          <a:noFill/>
-          <a:ln w="38100">
-            <a:solidFill>
-              <a:srgbClr val="2563EB"/>
-            </a:solidFill>
-            <a:prstDash val="solid"/>
+          <a:effectLst/>
+        </p:spPr>
+        <p:style>
+          <a:lnRef idx="1">
+            <a:schemeClr val="accent1"/>
+          </a:lnRef>
+          <a:fillRef idx="3">
+            <a:schemeClr val="accent1"/>
+          </a:fillRef>
+          <a:effectRef idx="2">
+            <a:schemeClr val="accent1"/>
+          </a:effectRef>
+          <a:fontRef idx="minor">
+            <a:schemeClr val="lt1"/>
+          </a:fontRef>
+        </p:style>
+        <p:txBody>
+          <a:bodyPr rtlCol="0" anchor="ctr"/>
+          <a:lstStyle/>
+          <a:p>
+            <a:pPr algn="ctr"/>
+          </a:p>
+        </p:txBody>
+      </p:sp>
+      <p:sp>
+        <p:nvSpPr>
+          <p:cNvPr id="3" name="Oval 2"/>
+          <p:cNvSpPr/>
+          <p:nvPr/>
+        </p:nvSpPr>
+        <p:spPr>
+          <a:xfrm>
+            <a:off x="10454335" y="548640"/>
+            <a:ext cx="2194560" cy="2194560"/>
+          </a:xfrm>
+          <a:prstGeom prst="ellipse">
+            <a:avLst/>
+          </a:prstGeom>
+          <a:solidFill>
+            <a:srgbClr val="E8963C">
+              <a:alpha val="15000"/>
+            </a:srgbClr>
+          </a:solidFill>
+          <a:ln>
+            <a:noFill/>
           </a:ln>
-        </p:spPr>
-      </p:sp>
-      <p:sp>
-        <p:nvSpPr>
-          <p:cNvPr id="5" name="Text 3"/>
-          <p:cNvSpPr/>
-          <p:nvPr/>
-        </p:nvSpPr>
-        <p:spPr>
-          <a:xfrm>
-            <a:off x="8732520" y="384048"/>
-            <a:ext cx="2834640" cy="347472"/>
-          </a:xfrm>
-          <a:prstGeom prst="rect">
-            <a:avLst/>
-          </a:prstGeom>
-          <a:noFill/>
-          <a:ln/>
-        </p:spPr>
-        <p:txBody>
-          <a:bodyPr wrap="square" lIns="0" tIns="0" rIns="0" bIns="0" rtlCol="0" anchor="ctr"/>
-          <a:lstStyle/>
-          <a:p>
-            <a:pPr algn="r" indent="0" marL="0">
-              <a:buNone/>
-            </a:pPr>
-            <a:r>
-              <a:rPr lang="en-US" sz="1100" dirty="0">
-                <a:solidFill>
-                  <a:srgbClr val="4B5563"/>
-                </a:solidFill>
-              </a:rPr>
-              <a:t>frase central</a:t>
-            </a:r>
-            <a:endParaRPr lang="en-US" sz="1100" dirty="0"/>
-          </a:p>
-        </p:txBody>
-      </p:sp>
-      <p:sp>
-        <p:nvSpPr>
-          <p:cNvPr id="6" name="Text 4"/>
-          <p:cNvSpPr/>
-          <p:nvPr/>
-        </p:nvSpPr>
-        <p:spPr>
-          <a:xfrm>
-            <a:off x="11292840" y="6446520"/>
-            <a:ext cx="411480" cy="201168"/>
-          </a:xfrm>
-          <a:prstGeom prst="rect">
-            <a:avLst/>
-          </a:prstGeom>
-          <a:noFill/>
-          <a:ln/>
-        </p:spPr>
-        <p:txBody>
-          <a:bodyPr wrap="square" lIns="0" tIns="0" rIns="0" bIns="0" rtlCol="0" anchor="ctr"/>
-          <a:lstStyle/>
-          <a:p>
-            <a:pPr algn="r" indent="0" marL="0">
-              <a:buNone/>
-            </a:pPr>
-            <a:r>
-              <a:rPr lang="en-US" sz="900" dirty="0">
-                <a:solidFill>
-                  <a:srgbClr val="4B5563"/>
-                </a:solidFill>
-              </a:rPr>
-              <a:t>36</a:t>
-            </a:r>
-            <a:endParaRPr lang="en-US" sz="900" dirty="0"/>
-          </a:p>
-        </p:txBody>
-      </p:sp>
-      <p:sp>
-        <p:nvSpPr>
-          <p:cNvPr id="7" name="Text 5"/>
-          <p:cNvSpPr/>
-          <p:nvPr/>
-        </p:nvSpPr>
-        <p:spPr>
-          <a:xfrm>
-            <a:off x="822960" y="1463040"/>
-            <a:ext cx="10698480" cy="594360"/>
-          </a:xfrm>
-          <a:prstGeom prst="rect">
-            <a:avLst/>
-          </a:prstGeom>
-          <a:noFill/>
-          <a:ln/>
-        </p:spPr>
-        <p:txBody>
-          <a:bodyPr wrap="square" lIns="1016" tIns="1016" rIns="1016" bIns="1016" rtlCol="0" anchor="t">
-            <a:normAutofit/>
+          <a:effectLst/>
+        </p:spPr>
+        <p:style>
+          <a:lnRef idx="1">
+            <a:schemeClr val="accent1"/>
+          </a:lnRef>
+          <a:fillRef idx="3">
+            <a:schemeClr val="accent1"/>
+          </a:fillRef>
+          <a:effectRef idx="2">
+            <a:schemeClr val="accent1"/>
+          </a:effectRef>
+          <a:fontRef idx="minor">
+            <a:schemeClr val="lt1"/>
+          </a:fontRef>
+        </p:style>
+        <p:txBody>
+          <a:bodyPr rtlCol="0" anchor="ctr"/>
+          <a:lstStyle/>
+          <a:p>
+            <a:pPr algn="ctr"/>
+          </a:p>
+        </p:txBody>
+      </p:sp>
+      <p:sp>
+        <p:nvSpPr>
+          <p:cNvPr id="4" name="TextBox 3"/>
+          <p:cNvSpPr txBox="1"/>
+          <p:nvPr/>
+        </p:nvSpPr>
+        <p:spPr>
+          <a:xfrm>
+            <a:off x="457200" y="457200"/>
+            <a:ext cx="7315200" cy="274320"/>
+          </a:xfrm>
+          <a:prstGeom prst="rect">
+            <a:avLst/>
+          </a:prstGeom>
+          <a:noFill/>
+        </p:spPr>
+        <p:txBody>
+          <a:bodyPr wrap="square">
+            <a:spAutoFit/>
           </a:bodyPr>
           <a:lstStyle/>
           <a:p>
-            <a:pPr indent="0" marL="0">
-              <a:buNone/>
-            </a:pPr>
-            <a:r>
-              <a:rPr lang="en-US" sz="3200" b="1" dirty="0">
-                <a:solidFill>
-                  <a:srgbClr val="111827"/>
-                </a:solidFill>
-                <a:latin typeface="Aptos" pitchFamily="34" charset="0"/>
-                <a:ea typeface="Aptos" pitchFamily="34" charset="-122"/>
-                <a:cs typeface="Aptos" pitchFamily="34" charset="-120"/>
-              </a:rPr>
-              <a:t>Big O não é o ponto de partida.</a:t>
-            </a:r>
-            <a:endParaRPr lang="en-US" sz="3200" dirty="0"/>
-          </a:p>
-        </p:txBody>
-      </p:sp>
-      <p:sp>
-        <p:nvSpPr>
-          <p:cNvPr id="8" name="Text 6"/>
-          <p:cNvSpPr/>
-          <p:nvPr/>
-        </p:nvSpPr>
-        <p:spPr>
-          <a:xfrm>
-            <a:off x="822960" y="2331720"/>
-            <a:ext cx="10698480" cy="594360"/>
-          </a:xfrm>
-          <a:prstGeom prst="rect">
-            <a:avLst/>
-          </a:prstGeom>
-          <a:noFill/>
-          <a:ln/>
-        </p:spPr>
-        <p:txBody>
-          <a:bodyPr wrap="square" lIns="1016" tIns="1016" rIns="1016" bIns="1016" rtlCol="0" anchor="t">
-            <a:normAutofit/>
+            <a:pPr algn="l"/>
+            <a:r>
+              <a:rPr sz="1100" b="1" i="0">
+                <a:solidFill>
+                  <a:srgbClr val="E8963C"/>
+                </a:solidFill>
+                <a:latin typeface="Calibri"/>
+              </a:rPr>
+              <a:t>SÍNTESE DA AULA</a:t>
+            </a:r>
+          </a:p>
+        </p:txBody>
+      </p:sp>
+      <p:sp>
+        <p:nvSpPr>
+          <p:cNvPr id="5" name="TextBox 4"/>
+          <p:cNvSpPr txBox="1"/>
+          <p:nvPr/>
+        </p:nvSpPr>
+        <p:spPr>
+          <a:xfrm>
+            <a:off x="457200" y="822960"/>
+            <a:ext cx="10607040" cy="777240"/>
+          </a:xfrm>
+          <a:prstGeom prst="rect">
+            <a:avLst/>
+          </a:prstGeom>
+          <a:noFill/>
+        </p:spPr>
+        <p:txBody>
+          <a:bodyPr wrap="square">
+            <a:spAutoFit/>
           </a:bodyPr>
           <a:lstStyle/>
           <a:p>
-            <a:pPr indent="0" marL="0">
-              <a:buNone/>
-            </a:pPr>
-            <a:r>
-              <a:rPr lang="en-US" sz="3200" b="1" dirty="0">
-                <a:solidFill>
-                  <a:srgbClr val="2563EB"/>
-                </a:solidFill>
-                <a:latin typeface="Aptos" pitchFamily="34" charset="0"/>
-                <a:ea typeface="Aptos" pitchFamily="34" charset="-122"/>
-                <a:cs typeface="Aptos" pitchFamily="34" charset="-120"/>
-              </a:rPr>
-              <a:t>O ponto de partida é a função de custo do algoritmo.</a:t>
-            </a:r>
-            <a:endParaRPr lang="en-US" sz="3200" dirty="0"/>
-          </a:p>
-        </p:txBody>
-      </p:sp>
-      <p:sp>
-        <p:nvSpPr>
-          <p:cNvPr id="9" name="Text 7"/>
-          <p:cNvSpPr/>
-          <p:nvPr/>
-        </p:nvSpPr>
-        <p:spPr>
-          <a:xfrm>
-            <a:off x="1280160" y="4023360"/>
-            <a:ext cx="9601200" cy="822960"/>
-          </a:xfrm>
-          <a:prstGeom prst="rect">
-            <a:avLst/>
-          </a:prstGeom>
-          <a:noFill/>
-          <a:ln/>
-        </p:spPr>
-        <p:txBody>
-          <a:bodyPr wrap="square" lIns="1016" tIns="1016" rIns="1016" bIns="1016" rtlCol="0" anchor="t">
-            <a:normAutofit/>
+            <a:pPr algn="l"/>
+            <a:r>
+              <a:rPr sz="2600" b="1" i="0">
+                <a:solidFill>
+                  <a:srgbClr val="FFFFFF"/>
+                </a:solidFill>
+                <a:latin typeface="Cambria"/>
+              </a:rPr>
+              <a:t>Big O não é o ponto de partida</a:t>
+            </a:r>
+          </a:p>
+        </p:txBody>
+      </p:sp>
+      <p:sp>
+        <p:nvSpPr>
+          <p:cNvPr id="6" name="Oval 5"/>
+          <p:cNvSpPr/>
+          <p:nvPr/>
+        </p:nvSpPr>
+        <p:spPr>
+          <a:xfrm>
+            <a:off x="457200" y="1783080"/>
+            <a:ext cx="457200" cy="457200"/>
+          </a:xfrm>
+          <a:prstGeom prst="ellipse">
+            <a:avLst/>
+          </a:prstGeom>
+          <a:solidFill>
+            <a:srgbClr val="E8963C"/>
+          </a:solidFill>
+          <a:ln>
+            <a:noFill/>
+          </a:ln>
+          <a:effectLst/>
+        </p:spPr>
+        <p:style>
+          <a:lnRef idx="1">
+            <a:schemeClr val="accent1"/>
+          </a:lnRef>
+          <a:fillRef idx="3">
+            <a:schemeClr val="accent1"/>
+          </a:fillRef>
+          <a:effectRef idx="2">
+            <a:schemeClr val="accent1"/>
+          </a:effectRef>
+          <a:fontRef idx="minor">
+            <a:schemeClr val="lt1"/>
+          </a:fontRef>
+        </p:style>
+        <p:txBody>
+          <a:bodyPr rtlCol="0" anchor="ctr"/>
+          <a:lstStyle/>
+          <a:p>
+            <a:pPr algn="ctr"/>
+          </a:p>
+        </p:txBody>
+      </p:sp>
+      <p:sp>
+        <p:nvSpPr>
+          <p:cNvPr id="7" name="TextBox 6"/>
+          <p:cNvSpPr txBox="1"/>
+          <p:nvPr/>
+        </p:nvSpPr>
+        <p:spPr>
+          <a:xfrm>
+            <a:off x="457200" y="1783080"/>
+            <a:ext cx="457200" cy="457200"/>
+          </a:xfrm>
+          <a:prstGeom prst="rect">
+            <a:avLst/>
+          </a:prstGeom>
+          <a:noFill/>
+        </p:spPr>
+        <p:txBody>
+          <a:bodyPr wrap="square" anchor="ctr">
+            <a:spAutoFit/>
           </a:bodyPr>
           <a:lstStyle/>
           <a:p>
-            <a:pPr indent="0" marL="0">
-              <a:buNone/>
-            </a:pPr>
-            <a:r>
-              <a:rPr lang="en-US" sz="2300" dirty="0">
-                <a:solidFill>
-                  <a:srgbClr val="4B5563"/>
-                </a:solidFill>
-                <a:latin typeface="Aptos" pitchFamily="34" charset="0"/>
-                <a:ea typeface="Aptos" pitchFamily="34" charset="-122"/>
-                <a:cs typeface="Aptos" pitchFamily="34" charset="-120"/>
-              </a:rPr>
-              <a:t>Laços criam crescimento. Sequências calibram crescimento. Programação dinâmica elimina recomputação.</a:t>
-            </a:r>
-            <a:endParaRPr lang="en-US" sz="2300" dirty="0"/>
+            <a:pPr algn="ctr"/>
+            <a:r>
+              <a:rPr sz="1800" b="1" i="0">
+                <a:solidFill>
+                  <a:srgbClr val="FFFFFF"/>
+                </a:solidFill>
+                <a:latin typeface="Cambria"/>
+              </a:rPr>
+              <a:t>01</a:t>
+            </a:r>
+          </a:p>
+        </p:txBody>
+      </p:sp>
+      <p:sp>
+        <p:nvSpPr>
+          <p:cNvPr id="8" name="TextBox 7"/>
+          <p:cNvSpPr txBox="1"/>
+          <p:nvPr/>
+        </p:nvSpPr>
+        <p:spPr>
+          <a:xfrm>
+            <a:off x="1115568" y="1755648"/>
+            <a:ext cx="9875520" cy="292608"/>
+          </a:xfrm>
+          <a:prstGeom prst="rect">
+            <a:avLst/>
+          </a:prstGeom>
+          <a:noFill/>
+        </p:spPr>
+        <p:txBody>
+          <a:bodyPr wrap="square">
+            <a:spAutoFit/>
+          </a:bodyPr>
+          <a:lstStyle/>
+          <a:p>
+            <a:pPr algn="l"/>
+            <a:r>
+              <a:rPr sz="1450" b="1" i="0">
+                <a:solidFill>
+                  <a:srgbClr val="FFFFFF"/>
+                </a:solidFill>
+                <a:latin typeface="Cambria"/>
+              </a:rPr>
+              <a:t>Big O não é o ponto de partida</a:t>
+            </a:r>
+          </a:p>
+        </p:txBody>
+      </p:sp>
+      <p:sp>
+        <p:nvSpPr>
+          <p:cNvPr id="9" name="TextBox 8"/>
+          <p:cNvSpPr txBox="1"/>
+          <p:nvPr/>
+        </p:nvSpPr>
+        <p:spPr>
+          <a:xfrm>
+            <a:off x="1115568" y="2057400"/>
+            <a:ext cx="9875520" cy="420000"/>
+          </a:xfrm>
+          <a:prstGeom prst="rect">
+            <a:avLst/>
+          </a:prstGeom>
+          <a:noFill/>
+        </p:spPr>
+        <p:txBody>
+          <a:bodyPr wrap="square">
+            <a:spAutoFit/>
+          </a:bodyPr>
+          <a:lstStyle/>
+          <a:p>
+            <a:pPr algn="l"/>
+            <a:r>
+              <a:rPr sz="1250" b="0" i="0">
+                <a:solidFill>
+                  <a:srgbClr val="C9D3DE"/>
+                </a:solidFill>
+                <a:latin typeface="Calibri"/>
+              </a:rPr>
+              <a:t>O ponto de partida é a função de custo T(n) do algoritmo — o Big O resume apenas o seu termo dominante.</a:t>
+            </a:r>
+          </a:p>
+        </p:txBody>
+      </p:sp>
+      <p:sp>
+        <p:nvSpPr>
+          <p:cNvPr id="10" name="Oval 9"/>
+          <p:cNvSpPr/>
+          <p:nvPr/>
+        </p:nvSpPr>
+        <p:spPr>
+          <a:xfrm>
+            <a:off x="457200" y="2679192"/>
+            <a:ext cx="457200" cy="457200"/>
+          </a:xfrm>
+          <a:prstGeom prst="ellipse">
+            <a:avLst/>
+          </a:prstGeom>
+          <a:solidFill>
+            <a:srgbClr val="E8963C"/>
+          </a:solidFill>
+          <a:ln>
+            <a:noFill/>
+          </a:ln>
+          <a:effectLst/>
+        </p:spPr>
+        <p:style>
+          <a:lnRef idx="1">
+            <a:schemeClr val="accent1"/>
+          </a:lnRef>
+          <a:fillRef idx="3">
+            <a:schemeClr val="accent1"/>
+          </a:fillRef>
+          <a:effectRef idx="2">
+            <a:schemeClr val="accent1"/>
+          </a:effectRef>
+          <a:fontRef idx="minor">
+            <a:schemeClr val="lt1"/>
+          </a:fontRef>
+        </p:style>
+        <p:txBody>
+          <a:bodyPr rtlCol="0" anchor="ctr"/>
+          <a:lstStyle/>
+          <a:p>
+            <a:pPr algn="ctr"/>
+          </a:p>
+        </p:txBody>
+      </p:sp>
+      <p:sp>
+        <p:nvSpPr>
+          <p:cNvPr id="11" name="TextBox 10"/>
+          <p:cNvSpPr txBox="1"/>
+          <p:nvPr/>
+        </p:nvSpPr>
+        <p:spPr>
+          <a:xfrm>
+            <a:off x="457200" y="2679192"/>
+            <a:ext cx="457200" cy="457200"/>
+          </a:xfrm>
+          <a:prstGeom prst="rect">
+            <a:avLst/>
+          </a:prstGeom>
+          <a:noFill/>
+        </p:spPr>
+        <p:txBody>
+          <a:bodyPr wrap="square" anchor="ctr">
+            <a:spAutoFit/>
+          </a:bodyPr>
+          <a:lstStyle/>
+          <a:p>
+            <a:pPr algn="ctr"/>
+            <a:r>
+              <a:rPr sz="1800" b="1" i="0">
+                <a:solidFill>
+                  <a:srgbClr val="FFFFFF"/>
+                </a:solidFill>
+                <a:latin typeface="Cambria"/>
+              </a:rPr>
+              <a:t>02</a:t>
+            </a:r>
+          </a:p>
+        </p:txBody>
+      </p:sp>
+      <p:sp>
+        <p:nvSpPr>
+          <p:cNvPr id="12" name="TextBox 11"/>
+          <p:cNvSpPr txBox="1"/>
+          <p:nvPr/>
+        </p:nvSpPr>
+        <p:spPr>
+          <a:xfrm>
+            <a:off x="1115568" y="2651760"/>
+            <a:ext cx="9875520" cy="292608"/>
+          </a:xfrm>
+          <a:prstGeom prst="rect">
+            <a:avLst/>
+          </a:prstGeom>
+          <a:noFill/>
+        </p:spPr>
+        <p:txBody>
+          <a:bodyPr wrap="square">
+            <a:spAutoFit/>
+          </a:bodyPr>
+          <a:lstStyle/>
+          <a:p>
+            <a:pPr algn="l"/>
+            <a:r>
+              <a:rPr sz="1450" b="1" i="0">
+                <a:solidFill>
+                  <a:srgbClr val="FFFFFF"/>
+                </a:solidFill>
+                <a:latin typeface="Cambria"/>
+              </a:rPr>
+              <a:t>Laços moldam o crescimento</a:t>
+            </a:r>
+          </a:p>
+        </p:txBody>
+      </p:sp>
+      <p:sp>
+        <p:nvSpPr>
+          <p:cNvPr id="13" name="TextBox 12"/>
+          <p:cNvSpPr txBox="1"/>
+          <p:nvPr/>
+        </p:nvSpPr>
+        <p:spPr>
+          <a:xfrm>
+            <a:off x="1115568" y="2953512"/>
+            <a:ext cx="9875520" cy="420000"/>
+          </a:xfrm>
+          <a:prstGeom prst="rect">
+            <a:avLst/>
+          </a:prstGeom>
+          <a:noFill/>
+        </p:spPr>
+        <p:txBody>
+          <a:bodyPr wrap="square">
+            <a:spAutoFit/>
+          </a:bodyPr>
+          <a:lstStyle/>
+          <a:p>
+            <a:pPr algn="l"/>
+            <a:r>
+              <a:rPr sz="1250" b="0" i="0">
+                <a:solidFill>
+                  <a:srgbClr val="C9D3DE"/>
+                </a:solidFill>
+                <a:latin typeface="Calibri"/>
+              </a:rPr>
+              <a:t>Sequências calibram constantes; laços aninhados multiplicam o crescimento — é aí que nascem O(n²) e O(n log n).</a:t>
+            </a:r>
+          </a:p>
+        </p:txBody>
+      </p:sp>
+      <p:sp>
+        <p:nvSpPr>
+          <p:cNvPr id="14" name="Oval 13"/>
+          <p:cNvSpPr/>
+          <p:nvPr/>
+        </p:nvSpPr>
+        <p:spPr>
+          <a:xfrm>
+            <a:off x="457200" y="3575304"/>
+            <a:ext cx="457200" cy="457200"/>
+          </a:xfrm>
+          <a:prstGeom prst="ellipse">
+            <a:avLst/>
+          </a:prstGeom>
+          <a:solidFill>
+            <a:srgbClr val="E8963C"/>
+          </a:solidFill>
+          <a:ln>
+            <a:noFill/>
+          </a:ln>
+          <a:effectLst/>
+        </p:spPr>
+        <p:style>
+          <a:lnRef idx="1">
+            <a:schemeClr val="accent1"/>
+          </a:lnRef>
+          <a:fillRef idx="3">
+            <a:schemeClr val="accent1"/>
+          </a:fillRef>
+          <a:effectRef idx="2">
+            <a:schemeClr val="accent1"/>
+          </a:effectRef>
+          <a:fontRef idx="minor">
+            <a:schemeClr val="lt1"/>
+          </a:fontRef>
+        </p:style>
+        <p:txBody>
+          <a:bodyPr rtlCol="0" anchor="ctr"/>
+          <a:lstStyle/>
+          <a:p>
+            <a:pPr algn="ctr"/>
+          </a:p>
+        </p:txBody>
+      </p:sp>
+      <p:sp>
+        <p:nvSpPr>
+          <p:cNvPr id="15" name="TextBox 14"/>
+          <p:cNvSpPr txBox="1"/>
+          <p:nvPr/>
+        </p:nvSpPr>
+        <p:spPr>
+          <a:xfrm>
+            <a:off x="457200" y="3575304"/>
+            <a:ext cx="457200" cy="457200"/>
+          </a:xfrm>
+          <a:prstGeom prst="rect">
+            <a:avLst/>
+          </a:prstGeom>
+          <a:noFill/>
+        </p:spPr>
+        <p:txBody>
+          <a:bodyPr wrap="square" anchor="ctr">
+            <a:spAutoFit/>
+          </a:bodyPr>
+          <a:lstStyle/>
+          <a:p>
+            <a:pPr algn="ctr"/>
+            <a:r>
+              <a:rPr sz="1800" b="1" i="0">
+                <a:solidFill>
+                  <a:srgbClr val="FFFFFF"/>
+                </a:solidFill>
+                <a:latin typeface="Cambria"/>
+              </a:rPr>
+              <a:t>03</a:t>
+            </a:r>
+          </a:p>
+        </p:txBody>
+      </p:sp>
+      <p:sp>
+        <p:nvSpPr>
+          <p:cNvPr id="16" name="TextBox 15"/>
+          <p:cNvSpPr txBox="1"/>
+          <p:nvPr/>
+        </p:nvSpPr>
+        <p:spPr>
+          <a:xfrm>
+            <a:off x="1115568" y="3547872"/>
+            <a:ext cx="9875520" cy="292608"/>
+          </a:xfrm>
+          <a:prstGeom prst="rect">
+            <a:avLst/>
+          </a:prstGeom>
+          <a:noFill/>
+        </p:spPr>
+        <p:txBody>
+          <a:bodyPr wrap="square">
+            <a:spAutoFit/>
+          </a:bodyPr>
+          <a:lstStyle/>
+          <a:p>
+            <a:pPr algn="l"/>
+            <a:r>
+              <a:rPr sz="1450" b="1" i="0">
+                <a:solidFill>
+                  <a:srgbClr val="FFFFFF"/>
+                </a:solidFill>
+                <a:latin typeface="Cambria"/>
+              </a:rPr>
+              <a:t>Programação dinâmica elimina recomputação</a:t>
+            </a:r>
+          </a:p>
+        </p:txBody>
+      </p:sp>
+      <p:sp>
+        <p:nvSpPr>
+          <p:cNvPr id="17" name="TextBox 16"/>
+          <p:cNvSpPr txBox="1"/>
+          <p:nvPr/>
+        </p:nvSpPr>
+        <p:spPr>
+          <a:xfrm>
+            <a:off x="1115568" y="3849624"/>
+            <a:ext cx="9875520" cy="420000"/>
+          </a:xfrm>
+          <a:prstGeom prst="rect">
+            <a:avLst/>
+          </a:prstGeom>
+          <a:noFill/>
+        </p:spPr>
+        <p:txBody>
+          <a:bodyPr wrap="square">
+            <a:spAutoFit/>
+          </a:bodyPr>
+          <a:lstStyle/>
+          <a:p>
+            <a:pPr algn="l"/>
+            <a:r>
+              <a:rPr sz="1250" b="0" i="0">
+                <a:solidFill>
+                  <a:srgbClr val="C9D3DE"/>
+                </a:solidFill>
+                <a:latin typeface="Calibri"/>
+              </a:rPr>
+              <a:t>Guardar resultados de subproblemas troca uma explosão exponencial, como no Fibonacci ingênuo, por custo linear.</a:t>
+            </a:r>
+          </a:p>
+        </p:txBody>
+      </p:sp>
+      <p:sp>
+        <p:nvSpPr>
+          <p:cNvPr id="18" name="Rounded Rectangle 17"/>
+          <p:cNvSpPr/>
+          <p:nvPr/>
+        </p:nvSpPr>
+        <p:spPr>
+          <a:xfrm>
+            <a:off x="457200" y="5111496"/>
+            <a:ext cx="11274552" cy="1051560"/>
+          </a:xfrm>
+          <a:prstGeom prst="roundRect">
+            <a:avLst>
+              <a:gd name="adj" fmla="val 7800"/>
+            </a:avLst>
+          </a:prstGeom>
+          <a:solidFill>
+            <a:srgbClr val="1E3A5A"/>
+          </a:solidFill>
+          <a:ln>
+            <a:noFill/>
+          </a:ln>
+          <a:effectLst/>
+        </p:spPr>
+        <p:style>
+          <a:lnRef idx="1">
+            <a:schemeClr val="accent1"/>
+          </a:lnRef>
+          <a:fillRef idx="3">
+            <a:schemeClr val="accent1"/>
+          </a:fillRef>
+          <a:effectRef idx="2">
+            <a:schemeClr val="accent1"/>
+          </a:effectRef>
+          <a:fontRef idx="minor">
+            <a:schemeClr val="lt1"/>
+          </a:fontRef>
+        </p:style>
+        <p:txBody>
+          <a:bodyPr rtlCol="0" anchor="ctr"/>
+          <a:lstStyle/>
+          <a:p>
+            <a:pPr algn="ctr"/>
+          </a:p>
+        </p:txBody>
+      </p:sp>
+      <p:sp>
+        <p:nvSpPr>
+          <p:cNvPr id="19" name="Oval 18"/>
+          <p:cNvSpPr/>
+          <p:nvPr/>
+        </p:nvSpPr>
+        <p:spPr>
+          <a:xfrm>
+            <a:off x="777240" y="5385816"/>
+            <a:ext cx="502920" cy="502920"/>
+          </a:xfrm>
+          <a:prstGeom prst="ellipse">
+            <a:avLst/>
+          </a:prstGeom>
+          <a:solidFill>
+            <a:srgbClr val="E8963C"/>
+          </a:solidFill>
+          <a:ln>
+            <a:noFill/>
+          </a:ln>
+          <a:effectLst/>
+        </p:spPr>
+        <p:style>
+          <a:lnRef idx="1">
+            <a:schemeClr val="accent1"/>
+          </a:lnRef>
+          <a:fillRef idx="3">
+            <a:schemeClr val="accent1"/>
+          </a:fillRef>
+          <a:effectRef idx="2">
+            <a:schemeClr val="accent1"/>
+          </a:effectRef>
+          <a:fontRef idx="minor">
+            <a:schemeClr val="lt1"/>
+          </a:fontRef>
+        </p:style>
+        <p:txBody>
+          <a:bodyPr rtlCol="0" anchor="ctr"/>
+          <a:lstStyle/>
+          <a:p>
+            <a:pPr algn="ctr"/>
+          </a:p>
+        </p:txBody>
+      </p:sp>
+      <p:pic>
+        <p:nvPicPr>
+          <p:cNvPr id="20" name="Picture 19" descr="arrow_a_seguir.png"/>
+          <p:cNvPicPr>
+            <a:picLocks noChangeAspect="1"/>
+          </p:cNvPicPr>
+          <p:nvPr/>
+        </p:nvPicPr>
+        <p:blipFill>
+          <a:blip r:embed="rId3"/>
+          <a:stretch>
+            <a:fillRect/>
+          </a:stretch>
+        </p:blipFill>
+        <p:spPr>
+          <a:xfrm>
+            <a:off x="896112" y="5504688"/>
+            <a:ext cx="265176" cy="265176"/>
+          </a:xfrm>
+          <a:prstGeom prst="rect">
+            <a:avLst/>
+          </a:prstGeom>
+        </p:spPr>
+      </p:pic>
+      <p:sp>
+        <p:nvSpPr>
+          <p:cNvPr id="21" name="TextBox 20"/>
+          <p:cNvSpPr txBox="1"/>
+          <p:nvPr/>
+        </p:nvSpPr>
+        <p:spPr>
+          <a:xfrm>
+            <a:off x="1508760" y="5294376"/>
+            <a:ext cx="9144000" cy="274320"/>
+          </a:xfrm>
+          <a:prstGeom prst="rect">
+            <a:avLst/>
+          </a:prstGeom>
+          <a:noFill/>
+        </p:spPr>
+        <p:txBody>
+          <a:bodyPr wrap="square">
+            <a:spAutoFit/>
+          </a:bodyPr>
+          <a:lstStyle/>
+          <a:p>
+            <a:pPr algn="l"/>
+            <a:r>
+              <a:rPr sz="1100" b="1" i="0">
+                <a:solidFill>
+                  <a:srgbClr val="E8963C"/>
+                </a:solidFill>
+                <a:latin typeface="Calibri"/>
+              </a:rPr>
+              <a:t>A SEGUIR — AULA 15 de 15</a:t>
+            </a:r>
+          </a:p>
+        </p:txBody>
+      </p:sp>
+      <p:sp>
+        <p:nvSpPr>
+          <p:cNvPr id="22" name="TextBox 21"/>
+          <p:cNvSpPr txBox="1"/>
+          <p:nvPr/>
+        </p:nvSpPr>
+        <p:spPr>
+          <a:xfrm>
+            <a:off x="1508760" y="5568696"/>
+            <a:ext cx="9601200" cy="457200"/>
+          </a:xfrm>
+          <a:prstGeom prst="rect">
+            <a:avLst/>
+          </a:prstGeom>
+          <a:noFill/>
+        </p:spPr>
+        <p:txBody>
+          <a:bodyPr wrap="square">
+            <a:spAutoFit/>
+          </a:bodyPr>
+          <a:lstStyle/>
+          <a:p>
+            <a:pPr algn="l"/>
+            <a:r>
+              <a:rPr sz="1900" b="1" i="0">
+                <a:solidFill>
+                  <a:srgbClr val="FFFFFF"/>
+                </a:solidFill>
+                <a:latin typeface="Cambria"/>
+              </a:rPr>
+              <a:t>Encerramento e Discussão</a:t>
+            </a:r>
+          </a:p>
+        </p:txBody>
+      </p:sp>
+      <p:sp>
+        <p:nvSpPr>
+          <p:cNvPr id="23" name="TextBox 22"/>
+          <p:cNvSpPr txBox="1"/>
+          <p:nvPr/>
+        </p:nvSpPr>
+        <p:spPr>
+          <a:xfrm>
+            <a:off x="457200" y="6528816"/>
+            <a:ext cx="7315200" cy="256032"/>
+          </a:xfrm>
+          <a:prstGeom prst="rect">
+            <a:avLst/>
+          </a:prstGeom>
+          <a:noFill/>
+        </p:spPr>
+        <p:txBody>
+          <a:bodyPr wrap="square">
+            <a:spAutoFit/>
+          </a:bodyPr>
+          <a:lstStyle/>
+          <a:p>
+            <a:pPr algn="l"/>
+            <a:r>
+              <a:rPr sz="900" b="0" i="0">
+                <a:solidFill>
+                  <a:srgbClr val="8CA0B3"/>
+                </a:solidFill>
+                <a:latin typeface="Calibri"/>
+              </a:rPr>
+              <a:t>Aula 14 · Complexidade de Algoritmos</a:t>
+            </a:r>
+          </a:p>
+        </p:txBody>
+      </p:sp>
+      <p:sp>
+        <p:nvSpPr>
+          <p:cNvPr id="24" name="TextBox 23"/>
+          <p:cNvSpPr txBox="1"/>
+          <p:nvPr/>
+        </p:nvSpPr>
+        <p:spPr>
+          <a:xfrm>
+            <a:off x="10362895" y="6528816"/>
+            <a:ext cx="1371600" cy="256032"/>
+          </a:xfrm>
+          <a:prstGeom prst="rect">
+            <a:avLst/>
+          </a:prstGeom>
+          <a:noFill/>
+        </p:spPr>
+        <p:txBody>
+          <a:bodyPr wrap="square">
+            <a:spAutoFit/>
+          </a:bodyPr>
+          <a:lstStyle/>
+          <a:p>
+            <a:pPr algn="r"/>
+            <a:r>
+              <a:rPr sz="900" b="0" i="0">
+                <a:solidFill>
+                  <a:srgbClr val="8CA0B3"/>
+                </a:solidFill>
+                <a:latin typeface="Calibri"/>
+              </a:rPr>
+              <a:t>36 / 37</a:t>
+            </a:r>
+          </a:p>
+        </p:txBody>
+      </p:sp>
+    </p:spTree>
+  </p:cSld>
+  <p:clrMapOvr>
+    <a:masterClrMapping/>
+  </p:clrMapOvr>
+</p:sld>
+</file>
+
+<file path=ppt/slides/slide37.xml><?xml version="1.0" encoding="utf-8"?>
+<p:sld xmlns:a="http://schemas.openxmlformats.org/drawingml/2006/main" xmlns:p="http://schemas.openxmlformats.org/presentationml/2006/main" xmlns:r="http://schemas.openxmlformats.org/officeDocument/2006/relationships">
+  <p:cSld>
+    <p:bg>
+      <p:bgPr>
+        <a:solidFill>
+          <a:srgbClr val="12233B"/>
+        </a:solidFill>
+        <a:effectLst/>
+      </p:bgPr>
+    </p:bg>
+    <p:spTree>
+      <p:nvGrpSpPr>
+        <p:cNvPr id="1" name=""/>
+        <p:cNvGrpSpPr/>
+        <p:nvPr/>
+      </p:nvGrpSpPr>
+      <p:grpSpPr/>
+      <p:sp>
+        <p:nvSpPr>
+          <p:cNvPr id="2" name="TextBox 1"/>
+          <p:cNvSpPr txBox="1"/>
+          <p:nvPr/>
+        </p:nvSpPr>
+        <p:spPr>
+          <a:xfrm>
+            <a:off x="548626" y="548640"/>
+            <a:ext cx="10484857" cy="411480"/>
+          </a:xfrm>
+          <a:prstGeom prst="rect">
+            <a:avLst/>
+          </a:prstGeom>
+          <a:noFill/>
+        </p:spPr>
+        <p:txBody>
+          <a:bodyPr wrap="square">
+            <a:spAutoFit/>
+          </a:bodyPr>
+          <a:lstStyle/>
+          <a:p>
+            <a:pPr algn="l"/>
+            <a:r>
+              <a:rPr sz="1200" b="1" i="0">
+                <a:solidFill>
+                  <a:srgbClr val="E8963C"/>
+                </a:solidFill>
+                <a:latin typeface="Calibri"/>
+              </a:rPr>
+              <a:t>REFERÊNCIAS</a:t>
+            </a:r>
+          </a:p>
+        </p:txBody>
+      </p:sp>
+      <p:sp>
+        <p:nvSpPr>
+          <p:cNvPr id="3" name="TextBox 2"/>
+          <p:cNvSpPr txBox="1"/>
+          <p:nvPr/>
+        </p:nvSpPr>
+        <p:spPr>
+          <a:xfrm>
+            <a:off x="548626" y="1097280"/>
+            <a:ext cx="10484857" cy="754380"/>
+          </a:xfrm>
+          <a:prstGeom prst="rect">
+            <a:avLst/>
+          </a:prstGeom>
+          <a:noFill/>
+        </p:spPr>
+        <p:txBody>
+          <a:bodyPr wrap="square">
+            <a:spAutoFit/>
+          </a:bodyPr>
+          <a:lstStyle/>
+          <a:p>
+            <a:pPr algn="l"/>
+            <a:r>
+              <a:rPr sz="3000" b="1" i="0">
+                <a:solidFill>
+                  <a:srgbClr val="FFFFFF"/>
+                </a:solidFill>
+                <a:latin typeface="Cambria"/>
+              </a:rPr>
+              <a:t>Referências</a:t>
+            </a:r>
+          </a:p>
+        </p:txBody>
+      </p:sp>
+      <p:sp>
+        <p:nvSpPr>
+          <p:cNvPr id="4" name="TextBox 3"/>
+          <p:cNvSpPr txBox="1"/>
+          <p:nvPr/>
+        </p:nvSpPr>
+        <p:spPr>
+          <a:xfrm>
+            <a:off x="548626" y="2057400"/>
+            <a:ext cx="10484857" cy="4114800"/>
+          </a:xfrm>
+          <a:prstGeom prst="rect">
+            <a:avLst/>
+          </a:prstGeom>
+          <a:noFill/>
+        </p:spPr>
+        <p:txBody>
+          <a:bodyPr wrap="square">
+            <a:spAutoFit/>
+          </a:bodyPr>
+          <a:lstStyle/>
+          <a:p>
+            <a:pPr algn="l"/>
+            <a:r>
+              <a:rPr sz="1400" b="0">
+                <a:solidFill>
+                  <a:srgbClr val="E4ECF3"/>
+                </a:solidFill>
+                <a:latin typeface="Calibri"/>
+              </a:rPr>
+              <a:t>RAABE, André; ZORZO, Avelino F.; BLIKSTEIN, Paulo. Computação na Educação Básica: Fundamentos e Experiências. Porto Alegre: Penso, 2020. Ebook. ISBN 9786581334048.</a:t>
+            </a:r>
+          </a:p>
+          <a:p>
+            <a:pPr algn="l">
+              <a:spcBef>
+                <a:spcPts val="1600"/>
+              </a:spcBef>
+            </a:pPr>
+            <a:r>
+              <a:rPr sz="1400" b="0">
+                <a:solidFill>
+                  <a:srgbClr val="E4ECF3"/>
+                </a:solidFill>
+                <a:latin typeface="Calibri"/>
+              </a:rPr>
+              <a:t>RIBEIRO, João Araújo. Introdução à Programação e aos algoritmos. Rio de Janeiro: LTC, 2019. ISBN 978-85-216-3640-3.</a:t>
+            </a:r>
+          </a:p>
+        </p:txBody>
+      </p:sp>
+      <p:sp>
+        <p:nvSpPr>
+          <p:cNvPr id="5" name="TextBox 4"/>
+          <p:cNvSpPr txBox="1"/>
+          <p:nvPr/>
+        </p:nvSpPr>
+        <p:spPr>
+          <a:xfrm>
+            <a:off x="548626" y="6343650"/>
+            <a:ext cx="10484857" cy="342900"/>
+          </a:xfrm>
+          <a:prstGeom prst="rect">
+            <a:avLst/>
+          </a:prstGeom>
+          <a:noFill/>
+        </p:spPr>
+        <p:txBody>
+          <a:bodyPr wrap="square">
+            <a:spAutoFit/>
+          </a:bodyPr>
+          <a:lstStyle/>
+          <a:p>
+            <a:pPr algn="l"/>
+            <a:r>
+              <a:rPr sz="900" b="0" i="0">
+                <a:solidFill>
+                  <a:srgbClr val="9AA5B1"/>
+                </a:solidFill>
+                <a:latin typeface="Calibri"/>
+              </a:rPr>
+              <a:t>Aula 14 · Complexidade de Algoritmos</a:t>
+            </a:r>
           </a:p>
         </p:txBody>
       </p:sp>
